--- a/BACKUP&RECOVERY/04장/04장_NOARCHIVELOG_복구_데이터파일_손상.pptx
+++ b/BACKUP&RECOVERY/04장/04장_NOARCHIVELOG_복구_데이터파일_손상.pptx
@@ -6635,7 +6635,7 @@
                 <a:latin typeface="Consolas"/>
                 <a:ea typeface="Consolas"/>
               </a:rPr>
-              <a:t>SYS@orcl&gt; !rm -f /u01/app/oracle/oradata/ORCL/users01.dbf</a:t>
+              <a:t>SYS@orcl&gt; !rm -f /u01/app/oracle/oradata/orcl/users01.dbf</a:t>
             </a:r>
           </a:p>
           <a:p>
@@ -6720,7 +6720,7 @@
                 <a:latin typeface="Consolas"/>
                 <a:ea typeface="Consolas"/>
               </a:rPr>
-              <a:t>ORA-01110: data file 7: '/u01/app/oracle/oradata/ORCL/users01.dbf'</a:t>
+              <a:t>ORA-01110: data file 7: '/u01/app/oracle/oradata/orcl/users01.dbf'</a:t>
             </a:r>
           </a:p>
           <a:p>
@@ -6822,7 +6822,7 @@
                 <a:latin typeface="Consolas"/>
                 <a:ea typeface="Consolas"/>
               </a:rPr>
-              <a:t>                 /u01/app/oracle/oradata/ORCL/</a:t>
+              <a:t>                 /u01/app/oracle/oradata/orcl/</a:t>
             </a:r>
           </a:p>
           <a:p>
@@ -7345,7 +7345,7 @@
                 <a:latin typeface="Consolas"/>
                 <a:ea typeface="Consolas"/>
               </a:rPr>
-              <a:t>SYS@orcl&gt; !cp -p /home/oracle/backup/cold/20250509/*.dbf /u01/app/oracle/oradata/ORCL/</a:t>
+              <a:t>SYS@orcl&gt; !cp -p /home/oracle/backup/cold/20250509/*.dbf /u01/app/oracle/oradata/orcl/</a:t>
             </a:r>
           </a:p>
           <a:p>
@@ -7362,7 +7362,7 @@
                 <a:latin typeface="Consolas"/>
                 <a:ea typeface="Consolas"/>
               </a:rPr>
-              <a:t>SYS@orcl&gt; !cp -p .../control0[12].ctl /u01/app/oracle/oradata/ORCL/</a:t>
+              <a:t>SYS@orcl&gt; !cp -p .../control0[12].ctl /u01/app/oracle/oradata/orcl/</a:t>
             </a:r>
           </a:p>
           <a:p>
@@ -7379,7 +7379,7 @@
                 <a:latin typeface="Consolas"/>
                 <a:ea typeface="Consolas"/>
               </a:rPr>
-              <a:t>SYS@orcl&gt; !cp -p .../redo0[134].log /u01/app/oracle/oradata/ORCL/</a:t>
+              <a:t>SYS@orcl&gt; !cp -p .../redo0[134].log /u01/app/oracle/oradata/orcl/</a:t>
             </a:r>
           </a:p>
           <a:p>
@@ -8018,7 +8018,7 @@
                 <a:latin typeface="Consolas"/>
                 <a:ea typeface="Consolas"/>
               </a:rPr>
-              <a:t>  2    '/u01/app/oracle/oradata/ORCL/users01.dbf'</a:t>
+              <a:t>  2    '/u01/app/oracle/oradata/orcl/users01.dbf'</a:t>
             </a:r>
           </a:p>
           <a:p>
@@ -8816,7 +8816,7 @@
                 <a:latin typeface="Consolas"/>
                 <a:ea typeface="Consolas"/>
               </a:rPr>
-              <a:t>  2    '/u01/app/oracle/oradata/ORCL/tbs01.dbf'</a:t>
+              <a:t>  2    '/u01/app/oracle/oradata/orcl/tbs01.dbf'</a:t>
             </a:r>
           </a:p>
           <a:p>
@@ -8833,7 +8833,7 @@
                 <a:latin typeface="Consolas"/>
                 <a:ea typeface="Consolas"/>
               </a:rPr>
-              <a:t>  3    AS '/u01/app/oracle/oradata/ORCL/tbs01.dbf';</a:t>
+              <a:t>  3    AS '/u01/app/oracle/oradata/orcl/tbs01.dbf';</a:t>
             </a:r>
           </a:p>
           <a:p>
@@ -10137,7 +10137,7 @@
                 <a:latin typeface="Consolas"/>
                 <a:ea typeface="Consolas"/>
               </a:rPr>
-              <a:t>         1 /u01/app/oracle/oradata/ORCL/system01.dbf     SYSTEM</a:t>
+              <a:t>         1 /u01/app/oracle/oradata/orcl/system01.dbf     SYSTEM</a:t>
             </a:r>
           </a:p>
           <a:p>
@@ -10154,7 +10154,7 @@
                 <a:latin typeface="Consolas"/>
                 <a:ea typeface="Consolas"/>
               </a:rPr>
-              <a:t>         3 /u01/app/oracle/oradata/ORCL/sysaux01.dbf     ONLINE</a:t>
+              <a:t>         3 /u01/app/oracle/oradata/orcl/sysaux01.dbf     ONLINE</a:t>
             </a:r>
           </a:p>
           <a:p>
@@ -10171,7 +10171,7 @@
                 <a:latin typeface="Consolas"/>
                 <a:ea typeface="Consolas"/>
               </a:rPr>
-              <a:t>         4 /u01/app/oracle/oradata/ORCL/undotbs01.dbf    ONLINE</a:t>
+              <a:t>         4 /u01/app/oracle/oradata/orcl/undotbs01.dbf    ONLINE</a:t>
             </a:r>
           </a:p>
           <a:p>
@@ -10188,7 +10188,7 @@
                 <a:latin typeface="Consolas"/>
                 <a:ea typeface="Consolas"/>
               </a:rPr>
-              <a:t>         7 /u01/app/oracle/oradata/ORCL/users01.dbf      ONLINE</a:t>
+              <a:t>         7 /u01/app/oracle/oradata/orcl/users01.dbf      ONLINE</a:t>
             </a:r>
           </a:p>
           <a:p>
@@ -10708,7 +10708,7 @@
                 <a:latin typeface="Consolas"/>
                 <a:ea typeface="Consolas"/>
               </a:rPr>
-              <a:t>SYS@orcl&gt; !rm -f /u01/app/oracle/oradata/ORCL/system01.dbf</a:t>
+              <a:t>SYS@orcl&gt; !rm -f /u01/app/oracle/oradata/orcl/system01.dbf</a:t>
             </a:r>
           </a:p>
           <a:p>
@@ -10793,7 +10793,7 @@
                 <a:latin typeface="Consolas"/>
                 <a:ea typeface="Consolas"/>
               </a:rPr>
-              <a:t>ORA-01110: data file 1: '/u01/app/oracle/oradata/ORCL/system01.dbf'</a:t>
+              <a:t>ORA-01110: data file 1: '/u01/app/oracle/oradata/orcl/system01.dbf'</a:t>
             </a:r>
           </a:p>
           <a:p>
@@ -10861,7 +10861,7 @@
                 <a:latin typeface="Consolas"/>
                 <a:ea typeface="Consolas"/>
               </a:rPr>
-              <a:t>                 /u01/app/oracle/oradata/ORCL/</a:t>
+              <a:t>                 /u01/app/oracle/oradata/orcl/</a:t>
             </a:r>
           </a:p>
           <a:p>
@@ -12400,7 +12400,7 @@
                 <a:latin typeface="Consolas"/>
                 <a:ea typeface="Consolas"/>
               </a:rPr>
-              <a:t>SYS@orcl&gt; !rm -f /u01/app/oracle/oradata/ORCL/sysaux01.dbf</a:t>
+              <a:t>SYS@orcl&gt; !rm -f /u01/app/oracle/oradata/orcl/sysaux01.dbf</a:t>
             </a:r>
           </a:p>
           <a:p>
@@ -12604,7 +12604,7 @@
                 <a:latin typeface="Consolas"/>
                 <a:ea typeface="Consolas"/>
               </a:rPr>
-              <a:t>ORA-01110: data file 3: '/u01/app/oracle/oradata/ORCL/sysaux01.dbf'</a:t>
+              <a:t>ORA-01110: data file 3: '/u01/app/oracle/oradata/orcl/sysaux01.dbf'</a:t>
             </a:r>
           </a:p>
           <a:p>
@@ -12689,7 +12689,7 @@
                 <a:latin typeface="Consolas"/>
                 <a:ea typeface="Consolas"/>
               </a:rPr>
-              <a:t>                 /u01/app/oracle/oradata/ORCL/</a:t>
+              <a:t>                 /u01/app/oracle/oradata/orcl/</a:t>
             </a:r>
           </a:p>
           <a:p>
@@ -19243,7 +19243,7 @@
                 <a:latin typeface="Consolas"/>
                 <a:ea typeface="Consolas"/>
               </a:rPr>
-              <a:t>                 /u01/app/oracle/oradata/ORCL/</a:t>
+              <a:t>                 /u01/app/oracle/oradata/orcl/</a:t>
             </a:r>
           </a:p>
           <a:p>
